--- a/02 Osnove Informacione Bezbednosti/02 Prezentacije/PPTX/01_Identitet_autentikacija_i_RBAC.pptx
+++ b/02 Osnove Informacione Bezbednosti/02 Prezentacije/PPTX/01_Identitet_autentikacija_i_RBAC.pptx
@@ -3145,7 +3145,7 @@
         <p:spPr>
           <a:xfrm xmlns:a="http://schemas.openxmlformats.org/drawingml/2006/main">
             <a:off x="723900" y="2076450"/>
-            <a:ext cx="5905500" cy="2352675"/>
+            <a:ext cx="5905500" cy="2850650"/>
           </a:xfrm>
           <a:prstGeom xmlns:a="http://schemas.openxmlformats.org/drawingml/2006/main" prst="roundRect">
             <a:avLst>
@@ -3327,7 +3327,7 @@
           <a:p xmlns:a="http://schemas.openxmlformats.org/drawingml/2006/main">
             <a:pPr algn="r">
               <a:lnSpc>
-                <a:spcPct val="100000"/>
+                <a:spcPts val="1300"/>
               </a:lnSpc>
               <a:buNone/>
               <a:defRPr sz="1013" b="0">
@@ -3354,7 +3354,7 @@
           <a:p xmlns:a="http://schemas.openxmlformats.org/drawingml/2006/main">
             <a:pPr algn="r">
               <a:lnSpc>
-                <a:spcPct val="100000"/>
+                <a:spcPts val="1300"/>
               </a:lnSpc>
               <a:buNone/>
               <a:defRPr sz="1013" b="0">
@@ -3381,7 +3381,7 @@
           <a:p xmlns:a="http://schemas.openxmlformats.org/drawingml/2006/main">
             <a:pPr algn="r">
               <a:lnSpc>
-                <a:spcPct val="100000"/>
+                <a:spcPts val="1300"/>
               </a:lnSpc>
               <a:buNone/>
               <a:defRPr sz="1013" b="0">
@@ -3408,7 +3408,7 @@
           <a:p xmlns:a="http://schemas.openxmlformats.org/drawingml/2006/main">
             <a:pPr algn="r">
               <a:lnSpc>
-                <a:spcPct val="100000"/>
+                <a:spcPts val="1300"/>
               </a:lnSpc>
               <a:buNone/>
               <a:defRPr sz="1013" b="0">
@@ -3435,7 +3435,7 @@
           <a:p xmlns:a="http://schemas.openxmlformats.org/drawingml/2006/main">
             <a:pPr algn="r">
               <a:lnSpc>
-                <a:spcPct val="100000"/>
+                <a:spcPts val="1300"/>
               </a:lnSpc>
               <a:buNone/>
               <a:defRPr sz="1013" b="0">
@@ -3462,7 +3462,7 @@
           <a:p xmlns:a="http://schemas.openxmlformats.org/drawingml/2006/main">
             <a:pPr algn="r">
               <a:lnSpc>
-                <a:spcPct val="100000"/>
+                <a:spcPts val="1300"/>
               </a:lnSpc>
               <a:buNone/>
               <a:defRPr sz="1013" b="0">
@@ -3489,7 +3489,7 @@
           <a:p xmlns:a="http://schemas.openxmlformats.org/drawingml/2006/main">
             <a:pPr algn="r">
               <a:lnSpc>
-                <a:spcPct val="100000"/>
+                <a:spcPts val="1300"/>
               </a:lnSpc>
               <a:buNone/>
               <a:defRPr sz="1013" b="0">
@@ -3516,7 +3516,7 @@
           <a:p xmlns:a="http://schemas.openxmlformats.org/drawingml/2006/main">
             <a:pPr algn="r">
               <a:lnSpc>
-                <a:spcPct val="100000"/>
+                <a:spcPts val="1300"/>
               </a:lnSpc>
               <a:buNone/>
               <a:defRPr sz="1013" b="0">
@@ -3543,7 +3543,7 @@
           <a:p xmlns:a="http://schemas.openxmlformats.org/drawingml/2006/main">
             <a:pPr algn="r">
               <a:lnSpc>
-                <a:spcPct val="100000"/>
+                <a:spcPts val="1300"/>
               </a:lnSpc>
               <a:buNone/>
               <a:defRPr sz="1013" b="0">
@@ -3570,7 +3570,7 @@
           <a:p xmlns:a="http://schemas.openxmlformats.org/drawingml/2006/main">
             <a:pPr algn="r">
               <a:lnSpc>
-                <a:spcPct val="100000"/>
+                <a:spcPts val="1300"/>
               </a:lnSpc>
               <a:buNone/>
               <a:defRPr sz="1013" b="0">
@@ -3594,6 +3594,87 @@
               <a:t>10</a:t>
             </a:r>
           </a:p>
+          <a:p xmlns:a="http://schemas.openxmlformats.org/drawingml/2006/main">
+            <a:pPr algn="r">
+              <a:lnSpc>
+                <a:spcPts val="1300"/>
+              </a:lnSpc>
+              <a:buNone/>
+              <a:defRPr sz="1013" b="0">
+                <a:solidFill>
+                  <a:srgbClr val="8792A6"/>
+                </a:solidFill>
+                <a:latin typeface="Consolas"/>
+                <a:ea typeface="Consolas"/>
+                <a:cs typeface="Consolas"/>
+              </a:defRPr>
+            </a:pPr>
+            <a:r>
+              <a:rPr sz="1013" b="0">
+                <a:solidFill>
+                  <a:srgbClr val="8792A6"/>
+                </a:solidFill>
+                <a:latin typeface="Consolas"/>
+                <a:ea typeface="Consolas"/>
+                <a:cs typeface="Consolas"/>
+              </a:rPr>
+              <a:t>11</a:t>
+            </a:r>
+          </a:p>
+          <a:p xmlns:a="http://schemas.openxmlformats.org/drawingml/2006/main">
+            <a:pPr algn="r">
+              <a:lnSpc>
+                <a:spcPts val="1300"/>
+              </a:lnSpc>
+              <a:buNone/>
+              <a:defRPr sz="1013" b="0">
+                <a:solidFill>
+                  <a:srgbClr val="8792A6"/>
+                </a:solidFill>
+                <a:latin typeface="Consolas"/>
+                <a:ea typeface="Consolas"/>
+                <a:cs typeface="Consolas"/>
+              </a:defRPr>
+            </a:pPr>
+            <a:r>
+              <a:rPr sz="1013" b="0">
+                <a:solidFill>
+                  <a:srgbClr val="8792A6"/>
+                </a:solidFill>
+                <a:latin typeface="Consolas"/>
+                <a:ea typeface="Consolas"/>
+                <a:cs typeface="Consolas"/>
+              </a:rPr>
+              <a:t>12</a:t>
+            </a:r>
+          </a:p>
+          <a:p xmlns:a="http://schemas.openxmlformats.org/drawingml/2006/main">
+            <a:pPr algn="r">
+              <a:lnSpc>
+                <a:spcPts val="1300"/>
+              </a:lnSpc>
+              <a:buNone/>
+              <a:defRPr sz="1013" b="0">
+                <a:solidFill>
+                  <a:srgbClr val="8792A6"/>
+                </a:solidFill>
+                <a:latin typeface="Consolas"/>
+                <a:ea typeface="Consolas"/>
+                <a:cs typeface="Consolas"/>
+              </a:defRPr>
+            </a:pPr>
+            <a:r>
+              <a:rPr sz="1013" b="0">
+                <a:solidFill>
+                  <a:srgbClr val="8792A6"/>
+                </a:solidFill>
+                <a:latin typeface="Consolas"/>
+                <a:ea typeface="Consolas"/>
+                <a:cs typeface="Consolas"/>
+              </a:rPr>
+              <a:t>13</a:t>
+            </a:r>
+          </a:p>
         </p:txBody>
       </p:sp>
       <p:sp>
@@ -3630,6 +3711,9 @@
           <a:lstStyle xmlns:a="http://schemas.openxmlformats.org/drawingml/2006/main"/>
           <a:p xmlns:a="http://schemas.openxmlformats.org/drawingml/2006/main">
             <a:pPr>
+              <a:lnSpc>
+                <a:spcPts val="1300"/>
+              </a:lnSpc>
               <a:buNone/>
               <a:defRPr sz="1088">
                 <a:solidFill>
@@ -3641,16 +3725,35 @@
               </a:defRPr>
             </a:pPr>
             <a:r>
-              <a:rPr b="1">
+              <a:rPr b="0">
+                <a:solidFill>
+                  <a:srgbClr val="263044"/>
+                </a:solidFill>
+              </a:rPr>
+              <a:t>[</a:t>
+            </a:r>
+            <a:r>
+              <a:rPr b="0">
                 <a:solidFill>
                   <a:srgbClr val="7651D4"/>
                 </a:solidFill>
               </a:rPr>
-              <a:t>[Test]</a:t>
+              <a:t>Test</a:t>
+            </a:r>
+            <a:r>
+              <a:rPr b="0">
+                <a:solidFill>
+                  <a:srgbClr val="263044"/>
+                </a:solidFill>
+              </a:rPr>
+              <a:t>]</a:t>
             </a:r>
           </a:p>
           <a:p xmlns:a="http://schemas.openxmlformats.org/drawingml/2006/main">
             <a:pPr>
+              <a:lnSpc>
+                <a:spcPts val="1300"/>
+              </a:lnSpc>
               <a:buNone/>
               <a:defRPr sz="1088">
                 <a:solidFill>
@@ -3667,15 +3770,39 @@
                   <a:srgbClr val="0067C5"/>
                 </a:solidFill>
               </a:rPr>
-              <a:t>public void </a:t>
+              <a:t>public</a:t>
             </a:r>
             <a:r>
               <a:rPr b="0">
                 <a:solidFill>
+                  <a:srgbClr val="263044"/>
+                </a:solidFill>
+              </a:rPr>
+              <a:t> </a:t>
+            </a:r>
+            <a:r>
+              <a:rPr b="1">
+                <a:solidFill>
+                  <a:srgbClr val="0067C5"/>
+                </a:solidFill>
+              </a:rPr>
+              <a:t>void</a:t>
+            </a:r>
+            <a:r>
+              <a:rPr b="0">
+                <a:solidFill>
+                  <a:srgbClr val="263044"/>
+                </a:solidFill>
+              </a:rPr>
+              <a:t> </a:t>
+            </a:r>
+            <a:r>
+              <a:rPr b="0">
+                <a:solidFill>
                   <a:srgbClr val="7651D4"/>
                 </a:solidFill>
               </a:rPr>
-              <a:t>Viewer_cannot_approve_report</a:t>
+              <a:t>Decide_WhenNoRoleGrantsPermission_Denies</a:t>
             </a:r>
             <a:r>
               <a:rPr b="0">
@@ -3688,6 +3815,9 @@
           </a:p>
           <a:p xmlns:a="http://schemas.openxmlformats.org/drawingml/2006/main">
             <a:pPr>
+              <a:lnSpc>
+                <a:spcPts val="1300"/>
+              </a:lnSpc>
               <a:buNone/>
               <a:defRPr sz="1088">
                 <a:solidFill>
@@ -3709,6 +3839,9 @@
           </a:p>
           <a:p xmlns:a="http://schemas.openxmlformats.org/drawingml/2006/main">
             <a:pPr>
+              <a:lnSpc>
+                <a:spcPts val="1300"/>
+              </a:lnSpc>
               <a:buNone/>
               <a:defRPr sz="1088">
                 <a:solidFill>
@@ -3720,12 +3853,20 @@
               </a:defRPr>
             </a:pPr>
             <a:r>
+              <a:rPr b="0">
+                <a:solidFill>
+                  <a:srgbClr val="263044"/>
+                </a:solidFill>
+              </a:rPr>
+              <a:t>    </a:t>
+            </a:r>
+            <a:r>
               <a:rPr b="1">
                 <a:solidFill>
                   <a:srgbClr val="0067C5"/>
                 </a:solidFill>
               </a:rPr>
-              <a:t>    var </a:t>
+              <a:t>var</a:t>
             </a:r>
             <a:r>
               <a:rPr b="0">
@@ -3733,15 +3874,15 @@
                   <a:srgbClr val="263044"/>
                 </a:solidFill>
               </a:rPr>
-              <a:t>user = User.WithRole(</a:t>
+              <a:t> decision = _policy.</a:t>
             </a:r>
             <a:r>
               <a:rPr b="0">
                 <a:solidFill>
-                  <a:srgbClr val="B45309"/>
-                </a:solidFill>
-              </a:rPr>
-              <a:t>"Viewer"</a:t>
+                  <a:srgbClr val="7651D4"/>
+                </a:solidFill>
+              </a:rPr>
+              <a:t>Decide</a:t>
             </a:r>
             <a:r>
               <a:rPr b="0">
@@ -3749,11 +3890,14 @@
                   <a:srgbClr val="263044"/>
                 </a:solidFill>
               </a:rPr>
-              <a:t>);</a:t>
+              <a:t>(</a:t>
             </a:r>
           </a:p>
           <a:p xmlns:a="http://schemas.openxmlformats.org/drawingml/2006/main">
             <a:pPr>
+              <a:lnSpc>
+                <a:spcPts val="1300"/>
+              </a:lnSpc>
               <a:buNone/>
               <a:defRPr sz="1088">
                 <a:solidFill>
@@ -3764,14 +3908,84 @@
                 <a:cs typeface="Consolas"/>
               </a:defRPr>
             </a:pPr>
-            <a:endParaRPr b="0">
-              <a:solidFill>
-                <a:srgbClr val="263044"/>
-              </a:solidFill>
-            </a:endParaRPr>
+            <a:r>
+              <a:rPr b="0">
+                <a:solidFill>
+                  <a:srgbClr val="263044"/>
+                </a:solidFill>
+              </a:rPr>
+              <a:t>        </a:t>
+            </a:r>
+            <a:r>
+              <a:rPr b="0">
+                <a:solidFill>
+                  <a:srgbClr val="7651D4"/>
+                </a:solidFill>
+              </a:rPr>
+              <a:t>Authenticated</a:t>
+            </a:r>
+            <a:r>
+              <a:rPr b="0">
+                <a:solidFill>
+                  <a:srgbClr val="263044"/>
+                </a:solidFill>
+              </a:rPr>
+              <a:t>(</a:t>
+            </a:r>
+            <a:r>
+              <a:rPr b="0">
+                <a:solidFill>
+                  <a:srgbClr val="B45309"/>
+                </a:solidFill>
+              </a:rPr>
+              <a:t>"Operator"</a:t>
+            </a:r>
+            <a:r>
+              <a:rPr b="0">
+                <a:solidFill>
+                  <a:srgbClr val="263044"/>
+                </a:solidFill>
+              </a:rPr>
+              <a:t>), </a:t>
+            </a:r>
+            <a:r>
+              <a:rPr b="0">
+                <a:solidFill>
+                  <a:srgbClr val="B45309"/>
+                </a:solidFill>
+              </a:rPr>
+              <a:t>"reports:export"</a:t>
+            </a:r>
+            <a:r>
+              <a:rPr b="0">
+                <a:solidFill>
+                  <a:srgbClr val="263044"/>
+                </a:solidFill>
+              </a:rPr>
+              <a:t>, [</a:t>
+            </a:r>
+            <a:r>
+              <a:rPr b="0">
+                <a:solidFill>
+                  <a:srgbClr val="7651D4"/>
+                </a:solidFill>
+              </a:rPr>
+              <a:t>Operator</a:t>
+            </a:r>
+            <a:r>
+              <a:rPr b="0">
+                <a:solidFill>
+                  <a:srgbClr val="263044"/>
+                </a:solidFill>
+              </a:rPr>
+              <a:t>]);</a:t>
+            </a:r>
           </a:p>
           <a:p xmlns:a="http://schemas.openxmlformats.org/drawingml/2006/main">
             <a:pPr>
+              <a:lnSpc>
+                <a:spcPts val="1300"/>
+              </a:lnSpc>
               <a:buNone/>
               <a:defRPr sz="1088">
                 <a:solidFill>
@@ -3783,24 +3997,19 @@
               </a:defRPr>
             </a:pPr>
             <a:r>
-              <a:rPr b="1">
-                <a:solidFill>
-                  <a:srgbClr val="0067C5"/>
-                </a:solidFill>
-              </a:rPr>
-              <a:t>    var </a:t>
-            </a:r>
-            <a:r>
               <a:rPr b="0">
                 <a:solidFill>
                   <a:srgbClr val="263044"/>
                 </a:solidFill>
               </a:rPr>
-              <a:t>result = api.Approve(report.Id, user);</a:t>
+              <a:t> </a:t>
             </a:r>
           </a:p>
           <a:p xmlns:a="http://schemas.openxmlformats.org/drawingml/2006/main">
             <a:pPr>
+              <a:lnSpc>
+                <a:spcPts val="1300"/>
+              </a:lnSpc>
               <a:buNone/>
               <a:defRPr sz="1088">
                 <a:solidFill>
@@ -3811,14 +4020,68 @@
                 <a:cs typeface="Consolas"/>
               </a:defRPr>
             </a:pPr>
-            <a:endParaRPr b="0">
-              <a:solidFill>
-                <a:srgbClr val="263044"/>
-              </a:solidFill>
-            </a:endParaRPr>
+            <a:r>
+              <a:rPr b="0">
+                <a:solidFill>
+                  <a:srgbClr val="263044"/>
+                </a:solidFill>
+              </a:rPr>
+              <a:t>    </a:t>
+            </a:r>
+            <a:r>
+              <a:rPr b="1">
+                <a:solidFill>
+                  <a:srgbClr val="0067C5"/>
+                </a:solidFill>
+              </a:rPr>
+              <a:t>using</a:t>
+            </a:r>
+            <a:r>
+              <a:rPr b="0">
+                <a:solidFill>
+                  <a:srgbClr val="263044"/>
+                </a:solidFill>
+              </a:rPr>
+              <a:t> (</a:t>
+            </a:r>
+            <a:r>
+              <a:rPr b="0">
+                <a:solidFill>
+                  <a:srgbClr val="7651D4"/>
+                </a:solidFill>
+              </a:rPr>
+              <a:t>Assert</a:t>
+            </a:r>
+            <a:r>
+              <a:rPr b="0">
+                <a:solidFill>
+                  <a:srgbClr val="263044"/>
+                </a:solidFill>
+              </a:rPr>
+              <a:t>.</a:t>
+            </a:r>
+            <a:r>
+              <a:rPr b="0">
+                <a:solidFill>
+                  <a:srgbClr val="7651D4"/>
+                </a:solidFill>
+              </a:rPr>
+              <a:t>EnterMultipleScope</a:t>
+            </a:r>
+            <a:r>
+              <a:rPr b="0">
+                <a:solidFill>
+                  <a:srgbClr val="263044"/>
+                </a:solidFill>
+              </a:rPr>
+              <a:t>())</a:t>
+            </a:r>
           </a:p>
           <a:p xmlns:a="http://schemas.openxmlformats.org/drawingml/2006/main">
             <a:pPr>
+              <a:lnSpc>
+                <a:spcPts val="1300"/>
+              </a:lnSpc>
               <a:buNone/>
               <a:defRPr sz="1088">
                 <a:solidFill>
@@ -3830,40 +4093,19 @@
               </a:defRPr>
             </a:pPr>
             <a:r>
-              <a:rPr b="1">
-                <a:solidFill>
-                  <a:srgbClr val="0067C5"/>
-                </a:solidFill>
-              </a:rPr>
-              <a:t>    Assert.That</a:t>
-            </a:r>
-            <a:r>
               <a:rPr b="0">
                 <a:solidFill>
                   <a:srgbClr val="263044"/>
                 </a:solidFill>
               </a:rPr>
-              <a:t>(result.StatusCode, Is.EqualTo(</a:t>
-            </a:r>
-            <a:r>
-              <a:rPr b="1">
-                <a:solidFill>
-                  <a:srgbClr val="138A5B"/>
-                </a:solidFill>
-              </a:rPr>
-              <a:t>403</a:t>
-            </a:r>
-            <a:r>
-              <a:rPr b="0">
-                <a:solidFill>
-                  <a:srgbClr val="263044"/>
-                </a:solidFill>
-              </a:rPr>
-              <a:t>));</a:t>
+              <a:t>    {</a:t>
             </a:r>
           </a:p>
           <a:p xmlns:a="http://schemas.openxmlformats.org/drawingml/2006/main">
             <a:pPr>
+              <a:lnSpc>
+                <a:spcPts val="1300"/>
+              </a:lnSpc>
               <a:buNone/>
               <a:defRPr sz="1088">
                 <a:solidFill>
@@ -3875,28 +4117,20 @@
               </a:defRPr>
             </a:pPr>
             <a:r>
-              <a:rPr b="1">
-                <a:solidFill>
-                  <a:srgbClr val="0067C5"/>
-                </a:solidFill>
-              </a:rPr>
-              <a:t>    audit.AssertDenied</a:t>
-            </a:r>
-            <a:r>
               <a:rPr b="0">
                 <a:solidFill>
                   <a:srgbClr val="263044"/>
                 </a:solidFill>
               </a:rPr>
-              <a:t>(user.Id, </a:t>
+              <a:t>        </a:t>
             </a:r>
             <a:r>
               <a:rPr b="0">
                 <a:solidFill>
-                  <a:srgbClr val="B45309"/>
-                </a:solidFill>
-              </a:rPr>
-              <a:t>"report.approve"</a:t>
+                  <a:srgbClr val="7651D4"/>
+                </a:solidFill>
+              </a:rPr>
+              <a:t>Assert</a:t>
             </a:r>
             <a:r>
               <a:rPr b="0">
@@ -3904,11 +4138,262 @@
                   <a:srgbClr val="263044"/>
                 </a:solidFill>
               </a:rPr>
-              <a:t>, report.Id);</a:t>
+              <a:t>.</a:t>
+            </a:r>
+            <a:r>
+              <a:rPr b="0">
+                <a:solidFill>
+                  <a:srgbClr val="7651D4"/>
+                </a:solidFill>
+              </a:rPr>
+              <a:t>That</a:t>
+            </a:r>
+            <a:r>
+              <a:rPr b="0">
+                <a:solidFill>
+                  <a:srgbClr val="263044"/>
+                </a:solidFill>
+              </a:rPr>
+              <a:t>(decision.</a:t>
+            </a:r>
+            <a:r>
+              <a:rPr b="0">
+                <a:solidFill>
+                  <a:srgbClr val="7651D4"/>
+                </a:solidFill>
+              </a:rPr>
+              <a:t>Allowed</a:t>
+            </a:r>
+            <a:r>
+              <a:rPr b="0">
+                <a:solidFill>
+                  <a:srgbClr val="263044"/>
+                </a:solidFill>
+              </a:rPr>
+              <a:t>, </a:t>
+            </a:r>
+            <a:r>
+              <a:rPr b="0">
+                <a:solidFill>
+                  <a:srgbClr val="7651D4"/>
+                </a:solidFill>
+              </a:rPr>
+              <a:t>Is</a:t>
+            </a:r>
+            <a:r>
+              <a:rPr b="0">
+                <a:solidFill>
+                  <a:srgbClr val="263044"/>
+                </a:solidFill>
+              </a:rPr>
+              <a:t>.</a:t>
+            </a:r>
+            <a:r>
+              <a:rPr b="0">
+                <a:solidFill>
+                  <a:srgbClr val="7651D4"/>
+                </a:solidFill>
+              </a:rPr>
+              <a:t>False</a:t>
+            </a:r>
+            <a:r>
+              <a:rPr b="0">
+                <a:solidFill>
+                  <a:srgbClr val="263044"/>
+                </a:solidFill>
+              </a:rPr>
+              <a:t>);</a:t>
             </a:r>
           </a:p>
           <a:p xmlns:a="http://schemas.openxmlformats.org/drawingml/2006/main">
             <a:pPr>
+              <a:lnSpc>
+                <a:spcPts val="1300"/>
+              </a:lnSpc>
+              <a:buNone/>
+              <a:defRPr sz="1088">
+                <a:solidFill>
+                  <a:srgbClr val="263044"/>
+                </a:solidFill>
+                <a:latin typeface="Consolas"/>
+                <a:ea typeface="Consolas"/>
+                <a:cs typeface="Consolas"/>
+              </a:defRPr>
+            </a:pPr>
+            <a:r>
+              <a:rPr b="0">
+                <a:solidFill>
+                  <a:srgbClr val="263044"/>
+                </a:solidFill>
+              </a:rPr>
+              <a:t>        </a:t>
+            </a:r>
+            <a:r>
+              <a:rPr b="0">
+                <a:solidFill>
+                  <a:srgbClr val="7651D4"/>
+                </a:solidFill>
+              </a:rPr>
+              <a:t>Assert</a:t>
+            </a:r>
+            <a:r>
+              <a:rPr b="0">
+                <a:solidFill>
+                  <a:srgbClr val="263044"/>
+                </a:solidFill>
+              </a:rPr>
+              <a:t>.</a:t>
+            </a:r>
+            <a:r>
+              <a:rPr b="0">
+                <a:solidFill>
+                  <a:srgbClr val="7651D4"/>
+                </a:solidFill>
+              </a:rPr>
+              <a:t>That</a:t>
+            </a:r>
+            <a:r>
+              <a:rPr b="0">
+                <a:solidFill>
+                  <a:srgbClr val="263044"/>
+                </a:solidFill>
+              </a:rPr>
+              <a:t>(decision.</a:t>
+            </a:r>
+            <a:r>
+              <a:rPr b="0">
+                <a:solidFill>
+                  <a:srgbClr val="7651D4"/>
+                </a:solidFill>
+              </a:rPr>
+              <a:t>Code</a:t>
+            </a:r>
+            <a:r>
+              <a:rPr b="0">
+                <a:solidFill>
+                  <a:srgbClr val="263044"/>
+                </a:solidFill>
+              </a:rPr>
+              <a:t>,</a:t>
+            </a:r>
+          </a:p>
+          <a:p xmlns:a="http://schemas.openxmlformats.org/drawingml/2006/main">
+            <a:pPr>
+              <a:lnSpc>
+                <a:spcPts val="1300"/>
+              </a:lnSpc>
+              <a:buNone/>
+              <a:defRPr sz="1088">
+                <a:solidFill>
+                  <a:srgbClr val="263044"/>
+                </a:solidFill>
+                <a:latin typeface="Consolas"/>
+                <a:ea typeface="Consolas"/>
+                <a:cs typeface="Consolas"/>
+              </a:defRPr>
+            </a:pPr>
+            <a:r>
+              <a:rPr b="0">
+                <a:solidFill>
+                  <a:srgbClr val="263044"/>
+                </a:solidFill>
+              </a:rPr>
+              <a:t>            </a:t>
+            </a:r>
+            <a:r>
+              <a:rPr b="0">
+                <a:solidFill>
+                  <a:srgbClr val="7651D4"/>
+                </a:solidFill>
+              </a:rPr>
+              <a:t>Is</a:t>
+            </a:r>
+            <a:r>
+              <a:rPr b="0">
+                <a:solidFill>
+                  <a:srgbClr val="263044"/>
+                </a:solidFill>
+              </a:rPr>
+              <a:t>.</a:t>
+            </a:r>
+            <a:r>
+              <a:rPr b="0">
+                <a:solidFill>
+                  <a:srgbClr val="7651D4"/>
+                </a:solidFill>
+              </a:rPr>
+              <a:t>EqualTo</a:t>
+            </a:r>
+            <a:r>
+              <a:rPr b="0">
+                <a:solidFill>
+                  <a:srgbClr val="263044"/>
+                </a:solidFill>
+              </a:rPr>
+              <a:t>(</a:t>
+            </a:r>
+            <a:r>
+              <a:rPr b="0">
+                <a:solidFill>
+                  <a:srgbClr val="7651D4"/>
+                </a:solidFill>
+              </a:rPr>
+              <a:t>AccessDecisionCodes</a:t>
+            </a:r>
+            <a:r>
+              <a:rPr b="0">
+                <a:solidFill>
+                  <a:srgbClr val="263044"/>
+                </a:solidFill>
+              </a:rPr>
+              <a:t>.</a:t>
+            </a:r>
+            <a:r>
+              <a:rPr b="0">
+                <a:solidFill>
+                  <a:srgbClr val="7651D4"/>
+                </a:solidFill>
+              </a:rPr>
+              <a:t>PermissionNotGranted</a:t>
+            </a:r>
+            <a:r>
+              <a:rPr b="0">
+                <a:solidFill>
+                  <a:srgbClr val="263044"/>
+                </a:solidFill>
+              </a:rPr>
+              <a:t>));</a:t>
+            </a:r>
+          </a:p>
+          <a:p xmlns:a="http://schemas.openxmlformats.org/drawingml/2006/main">
+            <a:pPr>
+              <a:lnSpc>
+                <a:spcPts val="1300"/>
+              </a:lnSpc>
+              <a:buNone/>
+              <a:defRPr sz="1088">
+                <a:solidFill>
+                  <a:srgbClr val="263044"/>
+                </a:solidFill>
+                <a:latin typeface="Consolas"/>
+                <a:ea typeface="Consolas"/>
+                <a:cs typeface="Consolas"/>
+              </a:defRPr>
+            </a:pPr>
+            <a:r>
+              <a:rPr b="0">
+                <a:solidFill>
+                  <a:srgbClr val="263044"/>
+                </a:solidFill>
+              </a:rPr>
+              <a:t>    }</a:t>
+            </a:r>
+          </a:p>
+          <a:p xmlns:a="http://schemas.openxmlformats.org/drawingml/2006/main">
+            <a:pPr>
+              <a:lnSpc>
+                <a:spcPts val="1300"/>
+              </a:lnSpc>
               <a:buNone/>
               <a:defRPr sz="1088">
                 <a:solidFill>
@@ -4143,7 +4628,7 @@
                 <a:ea typeface="Aptos"/>
                 <a:cs typeface="Aptos"/>
               </a:rPr>
-              <a:t>403, радња је одбијена</a:t>
+              <a:t>Радња је одбијена</a:t>
             </a:r>
           </a:p>
         </p:txBody>
@@ -4204,7 +4689,7 @@
                 <a:ea typeface="Aptos"/>
                 <a:cs typeface="Aptos"/>
               </a:rPr>
-              <a:t>Стање ресурса остаје непромењено.</a:t>
+              <a:t>Оператор има reports:view, али не и reports:export.</a:t>
             </a:r>
           </a:p>
         </p:txBody>
@@ -10821,7 +11306,7 @@
           <a:p xmlns:a="http://schemas.openxmlformats.org/drawingml/2006/main">
             <a:pPr algn="r">
               <a:lnSpc>
-                <a:spcPct val="100000"/>
+                <a:spcPts val="1300"/>
               </a:lnSpc>
               <a:buNone/>
               <a:defRPr sz="1013" b="0">
@@ -10848,7 +11333,7 @@
           <a:p xmlns:a="http://schemas.openxmlformats.org/drawingml/2006/main">
             <a:pPr algn="r">
               <a:lnSpc>
-                <a:spcPct val="100000"/>
+                <a:spcPts val="1300"/>
               </a:lnSpc>
               <a:buNone/>
               <a:defRPr sz="1013" b="0">
@@ -10875,7 +11360,7 @@
           <a:p xmlns:a="http://schemas.openxmlformats.org/drawingml/2006/main">
             <a:pPr algn="r">
               <a:lnSpc>
-                <a:spcPct val="100000"/>
+                <a:spcPts val="1300"/>
               </a:lnSpc>
               <a:buNone/>
               <a:defRPr sz="1013" b="0">
@@ -10902,7 +11387,7 @@
           <a:p xmlns:a="http://schemas.openxmlformats.org/drawingml/2006/main">
             <a:pPr algn="r">
               <a:lnSpc>
-                <a:spcPct val="100000"/>
+                <a:spcPts val="1300"/>
               </a:lnSpc>
               <a:buNone/>
               <a:defRPr sz="1013" b="0">
@@ -10929,7 +11414,7 @@
           <a:p xmlns:a="http://schemas.openxmlformats.org/drawingml/2006/main">
             <a:pPr algn="r">
               <a:lnSpc>
-                <a:spcPct val="100000"/>
+                <a:spcPts val="1300"/>
               </a:lnSpc>
               <a:buNone/>
               <a:defRPr sz="1013" b="0">
@@ -10956,7 +11441,7 @@
           <a:p xmlns:a="http://schemas.openxmlformats.org/drawingml/2006/main">
             <a:pPr algn="r">
               <a:lnSpc>
-                <a:spcPct val="100000"/>
+                <a:spcPts val="1300"/>
               </a:lnSpc>
               <a:buNone/>
               <a:defRPr sz="1013" b="0">
@@ -10983,7 +11468,7 @@
           <a:p xmlns:a="http://schemas.openxmlformats.org/drawingml/2006/main">
             <a:pPr algn="r">
               <a:lnSpc>
-                <a:spcPct val="100000"/>
+                <a:spcPts val="1300"/>
               </a:lnSpc>
               <a:buNone/>
               <a:defRPr sz="1013" b="0">
@@ -11010,7 +11495,7 @@
           <a:p xmlns:a="http://schemas.openxmlformats.org/drawingml/2006/main">
             <a:pPr algn="r">
               <a:lnSpc>
-                <a:spcPct val="100000"/>
+                <a:spcPts val="1300"/>
               </a:lnSpc>
               <a:buNone/>
               <a:defRPr sz="1013" b="0">
@@ -11037,7 +11522,7 @@
           <a:p xmlns:a="http://schemas.openxmlformats.org/drawingml/2006/main">
             <a:pPr algn="r">
               <a:lnSpc>
-                <a:spcPct val="100000"/>
+                <a:spcPts val="1300"/>
               </a:lnSpc>
               <a:buNone/>
               <a:defRPr sz="1013" b="0">
@@ -11064,7 +11549,7 @@
           <a:p xmlns:a="http://schemas.openxmlformats.org/drawingml/2006/main">
             <a:pPr algn="r">
               <a:lnSpc>
-                <a:spcPct val="100000"/>
+                <a:spcPts val="1300"/>
               </a:lnSpc>
               <a:buNone/>
               <a:defRPr sz="1013" b="0">
@@ -11091,7 +11576,7 @@
           <a:p xmlns:a="http://schemas.openxmlformats.org/drawingml/2006/main">
             <a:pPr algn="r">
               <a:lnSpc>
-                <a:spcPct val="100000"/>
+                <a:spcPts val="1300"/>
               </a:lnSpc>
               <a:buNone/>
               <a:defRPr sz="1013" b="0">
@@ -11151,6 +11636,9 @@
           <a:lstStyle xmlns:a="http://schemas.openxmlformats.org/drawingml/2006/main"/>
           <a:p xmlns:a="http://schemas.openxmlformats.org/drawingml/2006/main">
             <a:pPr>
+              <a:lnSpc>
+                <a:spcPts val="1300"/>
+              </a:lnSpc>
               <a:buNone/>
               <a:defRPr sz="1088">
                 <a:solidFill>
@@ -11196,6 +11684,9 @@
           </a:p>
           <a:p xmlns:a="http://schemas.openxmlformats.org/drawingml/2006/main">
             <a:pPr>
+              <a:lnSpc>
+                <a:spcPts val="1300"/>
+              </a:lnSpc>
               <a:buNone/>
               <a:defRPr sz="1088">
                 <a:solidFill>
@@ -11217,6 +11708,9 @@
           </a:p>
           <a:p xmlns:a="http://schemas.openxmlformats.org/drawingml/2006/main">
             <a:pPr>
+              <a:lnSpc>
+                <a:spcPts val="1300"/>
+              </a:lnSpc>
               <a:buNone/>
               <a:defRPr sz="1088">
                 <a:solidFill>
@@ -11246,6 +11740,9 @@
           </a:p>
           <a:p xmlns:a="http://schemas.openxmlformats.org/drawingml/2006/main">
             <a:pPr>
+              <a:lnSpc>
+                <a:spcPts val="1300"/>
+              </a:lnSpc>
               <a:buNone/>
               <a:defRPr sz="1088">
                 <a:solidFill>
@@ -11283,6 +11780,9 @@
           </a:p>
           <a:p xmlns:a="http://schemas.openxmlformats.org/drawingml/2006/main">
             <a:pPr>
+              <a:lnSpc>
+                <a:spcPts val="1300"/>
+              </a:lnSpc>
               <a:buNone/>
               <a:defRPr sz="1088">
                 <a:solidFill>
@@ -11304,6 +11804,9 @@
           </a:p>
           <a:p xmlns:a="http://schemas.openxmlformats.org/drawingml/2006/main">
             <a:pPr>
+              <a:lnSpc>
+                <a:spcPts val="1300"/>
+              </a:lnSpc>
               <a:buNone/>
               <a:defRPr sz="1088">
                 <a:solidFill>
@@ -11322,6 +11825,9 @@
           </a:p>
           <a:p xmlns:a="http://schemas.openxmlformats.org/drawingml/2006/main">
             <a:pPr>
+              <a:lnSpc>
+                <a:spcPts val="1300"/>
+              </a:lnSpc>
               <a:buNone/>
               <a:defRPr sz="1088">
                 <a:solidFill>
@@ -11351,6 +11857,9 @@
           </a:p>
           <a:p xmlns:a="http://schemas.openxmlformats.org/drawingml/2006/main">
             <a:pPr>
+              <a:lnSpc>
+                <a:spcPts val="1300"/>
+              </a:lnSpc>
               <a:buNone/>
               <a:defRPr sz="1088">
                 <a:solidFill>
@@ -11372,6 +11881,9 @@
           </a:p>
           <a:p xmlns:a="http://schemas.openxmlformats.org/drawingml/2006/main">
             <a:pPr>
+              <a:lnSpc>
+                <a:spcPts val="1300"/>
+              </a:lnSpc>
               <a:buNone/>
               <a:defRPr sz="1088">
                 <a:solidFill>
@@ -11401,6 +11913,9 @@
           </a:p>
           <a:p xmlns:a="http://schemas.openxmlformats.org/drawingml/2006/main">
             <a:pPr>
+              <a:lnSpc>
+                <a:spcPts val="1300"/>
+              </a:lnSpc>
               <a:buNone/>
               <a:defRPr sz="1088">
                 <a:solidFill>
@@ -11422,6 +11937,9 @@
           </a:p>
           <a:p xmlns:a="http://schemas.openxmlformats.org/drawingml/2006/main">
             <a:pPr>
+              <a:lnSpc>
+                <a:spcPts val="1300"/>
+              </a:lnSpc>
               <a:buNone/>
               <a:defRPr sz="1088">
                 <a:solidFill>
@@ -15200,7 +15718,7 @@
           <a:p xmlns:a="http://schemas.openxmlformats.org/drawingml/2006/main">
             <a:pPr algn="r">
               <a:lnSpc>
-                <a:spcPct val="100000"/>
+                <a:spcPts val="1300"/>
               </a:lnSpc>
               <a:buNone/>
               <a:defRPr sz="1125" b="0">
@@ -15227,7 +15745,7 @@
           <a:p xmlns:a="http://schemas.openxmlformats.org/drawingml/2006/main">
             <a:pPr algn="r">
               <a:lnSpc>
-                <a:spcPct val="100000"/>
+                <a:spcPts val="1300"/>
               </a:lnSpc>
               <a:buNone/>
               <a:defRPr sz="1125" b="0">
@@ -15254,7 +15772,7 @@
           <a:p xmlns:a="http://schemas.openxmlformats.org/drawingml/2006/main">
             <a:pPr algn="r">
               <a:lnSpc>
-                <a:spcPct val="100000"/>
+                <a:spcPts val="1300"/>
               </a:lnSpc>
               <a:buNone/>
               <a:defRPr sz="1125" b="0">
@@ -15281,7 +15799,7 @@
           <a:p xmlns:a="http://schemas.openxmlformats.org/drawingml/2006/main">
             <a:pPr algn="r">
               <a:lnSpc>
-                <a:spcPct val="100000"/>
+                <a:spcPts val="1300"/>
               </a:lnSpc>
               <a:buNone/>
               <a:defRPr sz="1125" b="0">
@@ -15308,7 +15826,7 @@
           <a:p xmlns:a="http://schemas.openxmlformats.org/drawingml/2006/main">
             <a:pPr algn="r">
               <a:lnSpc>
-                <a:spcPct val="100000"/>
+                <a:spcPts val="1300"/>
               </a:lnSpc>
               <a:buNone/>
               <a:defRPr sz="1125" b="0">
@@ -15335,7 +15853,7 @@
           <a:p xmlns:a="http://schemas.openxmlformats.org/drawingml/2006/main">
             <a:pPr algn="r">
               <a:lnSpc>
-                <a:spcPct val="100000"/>
+                <a:spcPts val="1300"/>
               </a:lnSpc>
               <a:buNone/>
               <a:defRPr sz="1125" b="0">
@@ -15362,7 +15880,7 @@
           <a:p xmlns:a="http://schemas.openxmlformats.org/drawingml/2006/main">
             <a:pPr algn="r">
               <a:lnSpc>
-                <a:spcPct val="100000"/>
+                <a:spcPts val="1300"/>
               </a:lnSpc>
               <a:buNone/>
               <a:defRPr sz="1125" b="0">
@@ -15389,7 +15907,7 @@
           <a:p xmlns:a="http://schemas.openxmlformats.org/drawingml/2006/main">
             <a:pPr algn="r">
               <a:lnSpc>
-                <a:spcPct val="100000"/>
+                <a:spcPts val="1300"/>
               </a:lnSpc>
               <a:buNone/>
               <a:defRPr sz="1125" b="0">
@@ -15449,6 +15967,9 @@
           <a:lstStyle xmlns:a="http://schemas.openxmlformats.org/drawingml/2006/main"/>
           <a:p xmlns:a="http://schemas.openxmlformats.org/drawingml/2006/main">
             <a:pPr>
+              <a:lnSpc>
+                <a:spcPts val="1300"/>
+              </a:lnSpc>
               <a:buNone/>
               <a:defRPr sz="1200">
                 <a:solidFill>
@@ -15470,6 +15991,9 @@
           </a:p>
           <a:p xmlns:a="http://schemas.openxmlformats.org/drawingml/2006/main">
             <a:pPr>
+              <a:lnSpc>
+                <a:spcPts val="1300"/>
+              </a:lnSpc>
               <a:buNone/>
               <a:defRPr sz="1200">
                 <a:solidFill>
@@ -15515,6 +16039,9 @@
           </a:p>
           <a:p xmlns:a="http://schemas.openxmlformats.org/drawingml/2006/main">
             <a:pPr>
+              <a:lnSpc>
+                <a:spcPts val="1300"/>
+              </a:lnSpc>
               <a:buNone/>
               <a:defRPr sz="1200">
                 <a:solidFill>
@@ -15560,6 +16087,9 @@
           </a:p>
           <a:p xmlns:a="http://schemas.openxmlformats.org/drawingml/2006/main">
             <a:pPr>
+              <a:lnSpc>
+                <a:spcPts val="1300"/>
+              </a:lnSpc>
               <a:buNone/>
               <a:defRPr sz="1200">
                 <a:solidFill>
@@ -15605,6 +16135,9 @@
           </a:p>
           <a:p xmlns:a="http://schemas.openxmlformats.org/drawingml/2006/main">
             <a:pPr>
+              <a:lnSpc>
+                <a:spcPts val="1300"/>
+              </a:lnSpc>
               <a:buNone/>
               <a:defRPr sz="1200">
                 <a:solidFill>
@@ -15650,6 +16183,9 @@
           </a:p>
           <a:p xmlns:a="http://schemas.openxmlformats.org/drawingml/2006/main">
             <a:pPr>
+              <a:lnSpc>
+                <a:spcPts val="1300"/>
+              </a:lnSpc>
               <a:buNone/>
               <a:defRPr sz="1200">
                 <a:solidFill>
@@ -15695,6 +16231,9 @@
           </a:p>
           <a:p xmlns:a="http://schemas.openxmlformats.org/drawingml/2006/main">
             <a:pPr>
+              <a:lnSpc>
+                <a:spcPts val="1300"/>
+              </a:lnSpc>
               <a:buNone/>
               <a:defRPr sz="1200">
                 <a:solidFill>
@@ -15732,6 +16271,9 @@
           </a:p>
           <a:p xmlns:a="http://schemas.openxmlformats.org/drawingml/2006/main">
             <a:pPr>
+              <a:lnSpc>
+                <a:spcPts val="1300"/>
+              </a:lnSpc>
               <a:buNone/>
               <a:defRPr sz="1200">
                 <a:solidFill>
@@ -27709,7 +28251,7 @@
         <p:spPr>
           <a:xfrm xmlns:a="http://schemas.openxmlformats.org/drawingml/2006/main">
             <a:off x="723900" y="2076450"/>
-            <a:ext cx="5715000" cy="2346694"/>
+            <a:ext cx="5715000" cy="3015750"/>
           </a:xfrm>
           <a:prstGeom xmlns:a="http://schemas.openxmlformats.org/drawingml/2006/main" prst="roundRect">
             <a:avLst>
@@ -27891,7 +28433,7 @@
           <a:p xmlns:a="http://schemas.openxmlformats.org/drawingml/2006/main">
             <a:pPr algn="r">
               <a:lnSpc>
-                <a:spcPct val="100000"/>
+                <a:spcPts val="1300"/>
               </a:lnSpc>
               <a:buNone/>
               <a:defRPr sz="1050" b="0">
@@ -27918,7 +28460,7 @@
           <a:p xmlns:a="http://schemas.openxmlformats.org/drawingml/2006/main">
             <a:pPr algn="r">
               <a:lnSpc>
-                <a:spcPct val="100000"/>
+                <a:spcPts val="1300"/>
               </a:lnSpc>
               <a:buNone/>
               <a:defRPr sz="1050" b="0">
@@ -27945,7 +28487,7 @@
           <a:p xmlns:a="http://schemas.openxmlformats.org/drawingml/2006/main">
             <a:pPr algn="r">
               <a:lnSpc>
-                <a:spcPct val="100000"/>
+                <a:spcPts val="1300"/>
               </a:lnSpc>
               <a:buNone/>
               <a:defRPr sz="1050" b="0">
@@ -27972,7 +28514,7 @@
           <a:p xmlns:a="http://schemas.openxmlformats.org/drawingml/2006/main">
             <a:pPr algn="r">
               <a:lnSpc>
-                <a:spcPct val="100000"/>
+                <a:spcPts val="1300"/>
               </a:lnSpc>
               <a:buNone/>
               <a:defRPr sz="1050" b="0">
@@ -27999,7 +28541,7 @@
           <a:p xmlns:a="http://schemas.openxmlformats.org/drawingml/2006/main">
             <a:pPr algn="r">
               <a:lnSpc>
-                <a:spcPct val="100000"/>
+                <a:spcPts val="1300"/>
               </a:lnSpc>
               <a:buNone/>
               <a:defRPr sz="1050" b="0">
@@ -28026,7 +28568,7 @@
           <a:p xmlns:a="http://schemas.openxmlformats.org/drawingml/2006/main">
             <a:pPr algn="r">
               <a:lnSpc>
-                <a:spcPct val="100000"/>
+                <a:spcPts val="1300"/>
               </a:lnSpc>
               <a:buNone/>
               <a:defRPr sz="1050" b="0">
@@ -28053,7 +28595,7 @@
           <a:p xmlns:a="http://schemas.openxmlformats.org/drawingml/2006/main">
             <a:pPr algn="r">
               <a:lnSpc>
-                <a:spcPct val="100000"/>
+                <a:spcPts val="1300"/>
               </a:lnSpc>
               <a:buNone/>
               <a:defRPr sz="1050" b="0">
@@ -28080,7 +28622,7 @@
           <a:p xmlns:a="http://schemas.openxmlformats.org/drawingml/2006/main">
             <a:pPr algn="r">
               <a:lnSpc>
-                <a:spcPct val="100000"/>
+                <a:spcPts val="1300"/>
               </a:lnSpc>
               <a:buNone/>
               <a:defRPr sz="1050" b="0">
@@ -28107,7 +28649,7 @@
           <a:p xmlns:a="http://schemas.openxmlformats.org/drawingml/2006/main">
             <a:pPr algn="r">
               <a:lnSpc>
-                <a:spcPct val="100000"/>
+                <a:spcPts val="1300"/>
               </a:lnSpc>
               <a:buNone/>
               <a:defRPr sz="1050" b="0">
@@ -28134,7 +28676,7 @@
           <a:p xmlns:a="http://schemas.openxmlformats.org/drawingml/2006/main">
             <a:pPr algn="r">
               <a:lnSpc>
-                <a:spcPct val="100000"/>
+                <a:spcPts val="1300"/>
               </a:lnSpc>
               <a:buNone/>
               <a:defRPr sz="1050" b="0">
@@ -28158,6 +28700,114 @@
               <a:t>10</a:t>
             </a:r>
           </a:p>
+          <a:p xmlns:a="http://schemas.openxmlformats.org/drawingml/2006/main">
+            <a:pPr algn="r">
+              <a:lnSpc>
+                <a:spcPts val="1300"/>
+              </a:lnSpc>
+              <a:buNone/>
+              <a:defRPr sz="1050" b="0">
+                <a:solidFill>
+                  <a:srgbClr val="8792A6"/>
+                </a:solidFill>
+                <a:latin typeface="Consolas"/>
+                <a:ea typeface="Consolas"/>
+                <a:cs typeface="Consolas"/>
+              </a:defRPr>
+            </a:pPr>
+            <a:r>
+              <a:rPr sz="1050" b="0">
+                <a:solidFill>
+                  <a:srgbClr val="8792A6"/>
+                </a:solidFill>
+                <a:latin typeface="Consolas"/>
+                <a:ea typeface="Consolas"/>
+                <a:cs typeface="Consolas"/>
+              </a:rPr>
+              <a:t>11</a:t>
+            </a:r>
+          </a:p>
+          <a:p xmlns:a="http://schemas.openxmlformats.org/drawingml/2006/main">
+            <a:pPr algn="r">
+              <a:lnSpc>
+                <a:spcPts val="1300"/>
+              </a:lnSpc>
+              <a:buNone/>
+              <a:defRPr sz="1050" b="0">
+                <a:solidFill>
+                  <a:srgbClr val="8792A6"/>
+                </a:solidFill>
+                <a:latin typeface="Consolas"/>
+                <a:ea typeface="Consolas"/>
+                <a:cs typeface="Consolas"/>
+              </a:defRPr>
+            </a:pPr>
+            <a:r>
+              <a:rPr sz="1050" b="0">
+                <a:solidFill>
+                  <a:srgbClr val="8792A6"/>
+                </a:solidFill>
+                <a:latin typeface="Consolas"/>
+                <a:ea typeface="Consolas"/>
+                <a:cs typeface="Consolas"/>
+              </a:rPr>
+              <a:t>12</a:t>
+            </a:r>
+          </a:p>
+          <a:p xmlns:a="http://schemas.openxmlformats.org/drawingml/2006/main">
+            <a:pPr algn="r">
+              <a:lnSpc>
+                <a:spcPts val="1300"/>
+              </a:lnSpc>
+              <a:buNone/>
+              <a:defRPr sz="1050" b="0">
+                <a:solidFill>
+                  <a:srgbClr val="8792A6"/>
+                </a:solidFill>
+                <a:latin typeface="Consolas"/>
+                <a:ea typeface="Consolas"/>
+                <a:cs typeface="Consolas"/>
+              </a:defRPr>
+            </a:pPr>
+            <a:r>
+              <a:rPr sz="1050" b="0">
+                <a:solidFill>
+                  <a:srgbClr val="8792A6"/>
+                </a:solidFill>
+                <a:latin typeface="Consolas"/>
+                <a:ea typeface="Consolas"/>
+                <a:cs typeface="Consolas"/>
+              </a:rPr>
+              <a:t>13</a:t>
+            </a:r>
+          </a:p>
+          <a:p xmlns:a="http://schemas.openxmlformats.org/drawingml/2006/main">
+            <a:pPr algn="r">
+              <a:lnSpc>
+                <a:spcPts val="1300"/>
+              </a:lnSpc>
+              <a:buNone/>
+              <a:defRPr sz="1050" b="0">
+                <a:solidFill>
+                  <a:srgbClr val="8792A6"/>
+                </a:solidFill>
+                <a:latin typeface="Consolas"/>
+                <a:ea typeface="Consolas"/>
+                <a:cs typeface="Consolas"/>
+              </a:defRPr>
+            </a:pPr>
+            <a:r>
+              <a:rPr sz="1050" b="0">
+                <a:solidFill>
+                  <a:srgbClr val="8792A6"/>
+                </a:solidFill>
+                <a:latin typeface="Consolas"/>
+                <a:ea typeface="Consolas"/>
+                <a:cs typeface="Consolas"/>
+              </a:rPr>
+              <a:t>14</a:t>
+            </a:r>
+          </a:p>
         </p:txBody>
       </p:sp>
       <p:sp>
@@ -28194,6 +28844,9 @@
           <a:lstStyle xmlns:a="http://schemas.openxmlformats.org/drawingml/2006/main"/>
           <a:p xmlns:a="http://schemas.openxmlformats.org/drawingml/2006/main">
             <a:pPr>
+              <a:lnSpc>
+                <a:spcPts val="1300"/>
+              </a:lnSpc>
               <a:buNone/>
               <a:defRPr sz="1125">
                 <a:solidFill>
@@ -28207,14 +28860,89 @@
             <a:r>
               <a:rPr b="1">
                 <a:solidFill>
+                  <a:srgbClr val="0067C5"/>
+                </a:solidFill>
+              </a:rPr>
+              <a:t>public</a:t>
+            </a:r>
+            <a:r>
+              <a:rPr b="0">
+                <a:solidFill>
+                  <a:srgbClr val="263044"/>
+                </a:solidFill>
+              </a:rPr>
+              <a:t> </a:t>
+            </a:r>
+            <a:r>
+              <a:rPr b="0">
+                <a:solidFill>
                   <a:srgbClr val="7651D4"/>
                 </a:solidFill>
               </a:rPr>
-              <a:t>[Authorize]</a:t>
+              <a:t>AccessDecision</a:t>
+            </a:r>
+            <a:r>
+              <a:rPr b="0">
+                <a:solidFill>
+                  <a:srgbClr val="263044"/>
+                </a:solidFill>
+              </a:rPr>
+              <a:t> </a:t>
+            </a:r>
+            <a:r>
+              <a:rPr b="0">
+                <a:solidFill>
+                  <a:srgbClr val="7651D4"/>
+                </a:solidFill>
+              </a:rPr>
+              <a:t>Decide</a:t>
+            </a:r>
+            <a:r>
+              <a:rPr b="0">
+                <a:solidFill>
+                  <a:srgbClr val="263044"/>
+                </a:solidFill>
+              </a:rPr>
+              <a:t>(</a:t>
+            </a:r>
+            <a:r>
+              <a:rPr b="0">
+                <a:solidFill>
+                  <a:srgbClr val="7651D4"/>
+                </a:solidFill>
+              </a:rPr>
+              <a:t>Actor</a:t>
+            </a:r>
+            <a:r>
+              <a:rPr b="0">
+                <a:solidFill>
+                  <a:srgbClr val="263044"/>
+                </a:solidFill>
+              </a:rPr>
+              <a:t> actor, </a:t>
+            </a:r>
+            <a:r>
+              <a:rPr b="1">
+                <a:solidFill>
+                  <a:srgbClr val="0067C5"/>
+                </a:solidFill>
+              </a:rPr>
+              <a:t>string</a:t>
+            </a:r>
+            <a:r>
+              <a:rPr b="0">
+                <a:solidFill>
+                  <a:srgbClr val="263044"/>
+                </a:solidFill>
+              </a:rPr>
+              <a:t> permission,</a:t>
             </a:r>
           </a:p>
           <a:p xmlns:a="http://schemas.openxmlformats.org/drawingml/2006/main">
             <a:pPr>
+              <a:lnSpc>
+                <a:spcPts val="1300"/>
+              </a:lnSpc>
               <a:buNone/>
               <a:defRPr sz="1125">
                 <a:solidFill>
@@ -28228,18 +28956,26 @@
             <a:r>
               <a:rPr b="0">
                 <a:solidFill>
+                  <a:srgbClr val="263044"/>
+                </a:solidFill>
+              </a:rPr>
+              <a:t>    </a:t>
+            </a:r>
+            <a:r>
+              <a:rPr b="0">
+                <a:solidFill>
                   <a:srgbClr val="7651D4"/>
                 </a:solidFill>
               </a:rPr>
-              <a:t>[HttpPost(</a:t>
+              <a:t>IEnumerable</a:t>
             </a:r>
             <a:r>
               <a:rPr b="0">
                 <a:solidFill>
-                  <a:srgbClr val="B45309"/>
-                </a:solidFill>
-              </a:rPr>
-              <a:t>"reports/{id}/approve"</a:t>
+                  <a:srgbClr val="263044"/>
+                </a:solidFill>
+              </a:rPr>
+              <a:t>&lt;</a:t>
             </a:r>
             <a:r>
               <a:rPr b="0">
@@ -28247,11 +28983,22 @@
                   <a:srgbClr val="7651D4"/>
                 </a:solidFill>
               </a:rPr>
-              <a:t>)]</a:t>
+              <a:t>Role</a:t>
+            </a:r>
+            <a:r>
+              <a:rPr b="0">
+                <a:solidFill>
+                  <a:srgbClr val="263044"/>
+                </a:solidFill>
+              </a:rPr>
+              <a:t>&gt; assignedRoles)</a:t>
             </a:r>
           </a:p>
           <a:p xmlns:a="http://schemas.openxmlformats.org/drawingml/2006/main">
             <a:pPr>
+              <a:lnSpc>
+                <a:spcPts val="1300"/>
+              </a:lnSpc>
               <a:buNone/>
               <a:defRPr sz="1125">
                 <a:solidFill>
@@ -28263,40 +29010,19 @@
               </a:defRPr>
             </a:pPr>
             <a:r>
-              <a:rPr b="1">
-                <a:solidFill>
-                  <a:srgbClr val="0067C5"/>
-                </a:solidFill>
-              </a:rPr>
-              <a:t>public </a:t>
-            </a:r>
-            <a:r>
               <a:rPr b="0">
                 <a:solidFill>
-                  <a:srgbClr val="7651D4"/>
-                </a:solidFill>
-              </a:rPr>
-              <a:t>IActionResult </a:t>
-            </a:r>
-            <a:r>
-              <a:rPr b="1">
-                <a:solidFill>
-                  <a:srgbClr val="0067C5"/>
-                </a:solidFill>
-              </a:rPr>
-              <a:t>Approve</a:t>
-            </a:r>
-            <a:r>
-              <a:rPr b="0">
-                <a:solidFill>
                   <a:srgbClr val="263044"/>
                 </a:solidFill>
               </a:rPr>
-              <a:t>(Guid id)</a:t>
+              <a:t>{</a:t>
             </a:r>
           </a:p>
           <a:p xmlns:a="http://schemas.openxmlformats.org/drawingml/2006/main">
             <a:pPr>
+              <a:lnSpc>
+                <a:spcPts val="1300"/>
+              </a:lnSpc>
               <a:buNone/>
               <a:defRPr sz="1125">
                 <a:solidFill>
@@ -28313,11 +29039,46 @@
                   <a:srgbClr val="263044"/>
                 </a:solidFill>
               </a:rPr>
-              <a:t>{</a:t>
+              <a:t>    </a:t>
+            </a:r>
+            <a:r>
+              <a:rPr b="1">
+                <a:solidFill>
+                  <a:srgbClr val="0067C5"/>
+                </a:solidFill>
+              </a:rPr>
+              <a:t>if</a:t>
+            </a:r>
+            <a:r>
+              <a:rPr b="0">
+                <a:solidFill>
+                  <a:srgbClr val="263044"/>
+                </a:solidFill>
+              </a:rPr>
+              <a:t> (!actor.</a:t>
+            </a:r>
+            <a:r>
+              <a:rPr b="0">
+                <a:solidFill>
+                  <a:srgbClr val="7651D4"/>
+                </a:solidFill>
+              </a:rPr>
+              <a:t>IsAuthenticated</a:t>
+            </a:r>
+            <a:r>
+              <a:rPr b="0">
+                <a:solidFill>
+                  <a:srgbClr val="263044"/>
+                </a:solidFill>
+              </a:rPr>
+              <a:t>)</a:t>
             </a:r>
           </a:p>
           <a:p xmlns:a="http://schemas.openxmlformats.org/drawingml/2006/main">
             <a:pPr>
+              <a:lnSpc>
+                <a:spcPts val="1300"/>
+              </a:lnSpc>
               <a:buNone/>
               <a:defRPr sz="1125">
                 <a:solidFill>
@@ -28329,12 +29090,20 @@
               </a:defRPr>
             </a:pPr>
             <a:r>
+              <a:rPr b="0">
+                <a:solidFill>
+                  <a:srgbClr val="263044"/>
+                </a:solidFill>
+              </a:rPr>
+              <a:t>        </a:t>
+            </a:r>
+            <a:r>
               <a:rPr b="1">
                 <a:solidFill>
                   <a:srgbClr val="0067C5"/>
                 </a:solidFill>
               </a:rPr>
-              <a:t>    if </a:t>
+              <a:t>return</a:t>
             </a:r>
             <a:r>
               <a:rPr b="0">
@@ -28342,15 +29111,31 @@
                   <a:srgbClr val="263044"/>
                 </a:solidFill>
               </a:rPr>
-              <a:t>(!access.Can(User, </a:t>
+              <a:t> </a:t>
+            </a:r>
+            <a:r>
+              <a:rPr b="1">
+                <a:solidFill>
+                  <a:srgbClr val="0067C5"/>
+                </a:solidFill>
+              </a:rPr>
+              <a:t>new</a:t>
             </a:r>
             <a:r>
               <a:rPr b="0">
                 <a:solidFill>
-                  <a:srgbClr val="B45309"/>
-                </a:solidFill>
-              </a:rPr>
-              <a:t>"report.approve"</a:t>
+                  <a:srgbClr val="263044"/>
+                </a:solidFill>
+              </a:rPr>
+              <a:t>(</a:t>
+            </a:r>
+            <a:r>
+              <a:rPr b="1">
+                <a:solidFill>
+                  <a:srgbClr val="0067C5"/>
+                </a:solidFill>
+              </a:rPr>
+              <a:t>false</a:t>
             </a:r>
             <a:r>
               <a:rPr b="0">
@@ -28358,11 +29143,46 @@
                   <a:srgbClr val="263044"/>
                 </a:solidFill>
               </a:rPr>
-              <a:t>, id))</a:t>
+              <a:t>, </a:t>
+            </a:r>
+            <a:r>
+              <a:rPr b="0">
+                <a:solidFill>
+                  <a:srgbClr val="7651D4"/>
+                </a:solidFill>
+              </a:rPr>
+              <a:t>AccessDecisionCodes</a:t>
+            </a:r>
+            <a:r>
+              <a:rPr b="0">
+                <a:solidFill>
+                  <a:srgbClr val="263044"/>
+                </a:solidFill>
+              </a:rPr>
+              <a:t>.</a:t>
+            </a:r>
+            <a:r>
+              <a:rPr b="0">
+                <a:solidFill>
+                  <a:srgbClr val="7651D4"/>
+                </a:solidFill>
+              </a:rPr>
+              <a:t>NotAuthenticated</a:t>
+            </a:r>
+            <a:r>
+              <a:rPr b="0">
+                <a:solidFill>
+                  <a:srgbClr val="263044"/>
+                </a:solidFill>
+              </a:rPr>
+              <a:t>,</a:t>
             </a:r>
           </a:p>
           <a:p xmlns:a="http://schemas.openxmlformats.org/drawingml/2006/main">
             <a:pPr>
+              <a:lnSpc>
+                <a:spcPts val="1300"/>
+              </a:lnSpc>
               <a:buNone/>
               <a:defRPr sz="1125">
                 <a:solidFill>
@@ -28374,32 +29194,35 @@
               </a:defRPr>
             </a:pPr>
             <a:r>
-              <a:rPr b="1">
-                <a:solidFill>
-                  <a:srgbClr val="0067C5"/>
-                </a:solidFill>
-              </a:rPr>
-              <a:t>        return </a:t>
-            </a:r>
-            <a:r>
               <a:rPr b="0">
                 <a:solidFill>
-                  <a:srgbClr val="7651D4"/>
-                </a:solidFill>
-              </a:rPr>
-              <a:t>Forbid</a:t>
+                  <a:srgbClr val="263044"/>
+                </a:solidFill>
+              </a:rPr>
+              <a:t>            </a:t>
             </a:r>
             <a:r>
               <a:rPr b="0">
                 <a:solidFill>
+                  <a:srgbClr val="B45309"/>
+                </a:solidFill>
+              </a:rPr>
+              <a:t>"Identitet nije potvrđen."</a:t>
+            </a:r>
+            <a:r>
+              <a:rPr b="0">
+                <a:solidFill>
                   <a:srgbClr val="263044"/>
                 </a:solidFill>
               </a:rPr>
-              <a:t>();</a:t>
+              <a:t>);</a:t>
             </a:r>
           </a:p>
           <a:p xmlns:a="http://schemas.openxmlformats.org/drawingml/2006/main">
             <a:pPr>
+              <a:lnSpc>
+                <a:spcPts val="1300"/>
+              </a:lnSpc>
               <a:buNone/>
               <a:defRPr sz="1125">
                 <a:solidFill>
@@ -28410,14 +29233,20 @@
                 <a:cs typeface="Consolas"/>
               </a:defRPr>
             </a:pPr>
-            <a:endParaRPr b="0">
-              <a:solidFill>
-                <a:srgbClr val="263044"/>
-              </a:solidFill>
-            </a:endParaRPr>
+            <a:r>
+              <a:rPr b="0">
+                <a:solidFill>
+                  <a:srgbClr val="263044"/>
+                </a:solidFill>
+              </a:rPr>
+              <a:t> </a:t>
+            </a:r>
           </a:p>
           <a:p xmlns:a="http://schemas.openxmlformats.org/drawingml/2006/main">
             <a:pPr>
+              <a:lnSpc>
+                <a:spcPts val="1300"/>
+              </a:lnSpc>
               <a:buNone/>
               <a:defRPr sz="1125">
                 <a:solidFill>
@@ -28434,7 +29263,7 @@
                   <a:srgbClr val="263044"/>
                 </a:solidFill>
               </a:rPr>
-              <a:t>    reports.</a:t>
+              <a:t>    </a:t>
             </a:r>
             <a:r>
               <a:rPr b="1">
@@ -28442,7 +29271,7 @@
                   <a:srgbClr val="0067C5"/>
                 </a:solidFill>
               </a:rPr>
-              <a:t>Approve</a:t>
+              <a:t>var</a:t>
             </a:r>
             <a:r>
               <a:rPr b="0">
@@ -28450,11 +29279,14 @@
                   <a:srgbClr val="263044"/>
                 </a:solidFill>
               </a:rPr>
-              <a:t>(id);</a:t>
+              <a:t> grantingRole = assignedRoles</a:t>
             </a:r>
           </a:p>
           <a:p xmlns:a="http://schemas.openxmlformats.org/drawingml/2006/main">
             <a:pPr>
+              <a:lnSpc>
+                <a:spcPts val="1300"/>
+              </a:lnSpc>
               <a:buNone/>
               <a:defRPr sz="1125">
                 <a:solidFill>
@@ -28466,20 +29298,20 @@
               </a:defRPr>
             </a:pPr>
             <a:r>
-              <a:rPr b="1">
-                <a:solidFill>
-                  <a:srgbClr val="0067C5"/>
-                </a:solidFill>
-              </a:rPr>
-              <a:t>    return </a:t>
-            </a:r>
-            <a:r>
               <a:rPr b="0">
                 <a:solidFill>
+                  <a:srgbClr val="263044"/>
+                </a:solidFill>
+              </a:rPr>
+              <a:t>        .</a:t>
+            </a:r>
+            <a:r>
+              <a:rPr b="0">
+                <a:solidFill>
                   <a:srgbClr val="7651D4"/>
                 </a:solidFill>
               </a:rPr>
-              <a:t>NoContent</a:t>
+              <a:t>FirstOrDefault</a:t>
             </a:r>
             <a:r>
               <a:rPr b="0">
@@ -28487,11 +29319,30 @@
                   <a:srgbClr val="263044"/>
                 </a:solidFill>
               </a:rPr>
-              <a:t>();</a:t>
+              <a:t>(role =&gt; </a:t>
+            </a:r>
+            <a:r>
+              <a:rPr b="0">
+                <a:solidFill>
+                  <a:srgbClr val="7651D4"/>
+                </a:solidFill>
+              </a:rPr>
+              <a:t>Grants</a:t>
+            </a:r>
+            <a:r>
+              <a:rPr b="0">
+                <a:solidFill>
+                  <a:srgbClr val="263044"/>
+                </a:solidFill>
+              </a:rPr>
+              <a:t>(role, permission));</a:t>
             </a:r>
           </a:p>
           <a:p xmlns:a="http://schemas.openxmlformats.org/drawingml/2006/main">
             <a:pPr>
+              <a:lnSpc>
+                <a:spcPts val="1300"/>
+              </a:lnSpc>
               <a:buNone/>
               <a:defRPr sz="1125">
                 <a:solidFill>
@@ -28508,6 +29359,270 @@
                   <a:srgbClr val="263044"/>
                 </a:solidFill>
               </a:rPr>
+              <a:t>    </a:t>
+            </a:r>
+            <a:r>
+              <a:rPr b="1">
+                <a:solidFill>
+                  <a:srgbClr val="0067C5"/>
+                </a:solidFill>
+              </a:rPr>
+              <a:t>return</a:t>
+            </a:r>
+            <a:r>
+              <a:rPr b="0">
+                <a:solidFill>
+                  <a:srgbClr val="263044"/>
+                </a:solidFill>
+              </a:rPr>
+              <a:t> grantingRole </a:t>
+            </a:r>
+            <a:r>
+              <a:rPr b="1">
+                <a:solidFill>
+                  <a:srgbClr val="0067C5"/>
+                </a:solidFill>
+              </a:rPr>
+              <a:t>is</a:t>
+            </a:r>
+            <a:r>
+              <a:rPr b="0">
+                <a:solidFill>
+                  <a:srgbClr val="263044"/>
+                </a:solidFill>
+              </a:rPr>
+              <a:t> </a:t>
+            </a:r>
+            <a:r>
+              <a:rPr b="1">
+                <a:solidFill>
+                  <a:srgbClr val="0067C5"/>
+                </a:solidFill>
+              </a:rPr>
+              <a:t>null</a:t>
+            </a:r>
+          </a:p>
+          <a:p xmlns:a="http://schemas.openxmlformats.org/drawingml/2006/main">
+            <a:pPr>
+              <a:lnSpc>
+                <a:spcPts val="1300"/>
+              </a:lnSpc>
+              <a:buNone/>
+              <a:defRPr sz="1125">
+                <a:solidFill>
+                  <a:srgbClr val="263044"/>
+                </a:solidFill>
+                <a:latin typeface="Consolas"/>
+                <a:ea typeface="Consolas"/>
+                <a:cs typeface="Consolas"/>
+              </a:defRPr>
+            </a:pPr>
+            <a:r>
+              <a:rPr b="0">
+                <a:solidFill>
+                  <a:srgbClr val="263044"/>
+                </a:solidFill>
+              </a:rPr>
+              <a:t>        ? </a:t>
+            </a:r>
+            <a:r>
+              <a:rPr b="1">
+                <a:solidFill>
+                  <a:srgbClr val="0067C5"/>
+                </a:solidFill>
+              </a:rPr>
+              <a:t>new</a:t>
+            </a:r>
+            <a:r>
+              <a:rPr b="0">
+                <a:solidFill>
+                  <a:srgbClr val="263044"/>
+                </a:solidFill>
+              </a:rPr>
+              <a:t>(</a:t>
+            </a:r>
+            <a:r>
+              <a:rPr b="1">
+                <a:solidFill>
+                  <a:srgbClr val="0067C5"/>
+                </a:solidFill>
+              </a:rPr>
+              <a:t>false</a:t>
+            </a:r>
+            <a:r>
+              <a:rPr b="0">
+                <a:solidFill>
+                  <a:srgbClr val="263044"/>
+                </a:solidFill>
+              </a:rPr>
+              <a:t>,</a:t>
+            </a:r>
+          </a:p>
+          <a:p xmlns:a="http://schemas.openxmlformats.org/drawingml/2006/main">
+            <a:pPr>
+              <a:lnSpc>
+                <a:spcPts val="1300"/>
+              </a:lnSpc>
+              <a:buNone/>
+              <a:defRPr sz="1125">
+                <a:solidFill>
+                  <a:srgbClr val="263044"/>
+                </a:solidFill>
+                <a:latin typeface="Consolas"/>
+                <a:ea typeface="Consolas"/>
+                <a:cs typeface="Consolas"/>
+              </a:defRPr>
+            </a:pPr>
+            <a:r>
+              <a:rPr b="0">
+                <a:solidFill>
+                  <a:srgbClr val="263044"/>
+                </a:solidFill>
+              </a:rPr>
+              <a:t>            </a:t>
+            </a:r>
+            <a:r>
+              <a:rPr b="0">
+                <a:solidFill>
+                  <a:srgbClr val="7651D4"/>
+                </a:solidFill>
+              </a:rPr>
+              <a:t>AccessDecisionCodes</a:t>
+            </a:r>
+            <a:r>
+              <a:rPr b="0">
+                <a:solidFill>
+                  <a:srgbClr val="263044"/>
+                </a:solidFill>
+              </a:rPr>
+              <a:t>.</a:t>
+            </a:r>
+            <a:r>
+              <a:rPr b="0">
+                <a:solidFill>
+                  <a:srgbClr val="7651D4"/>
+                </a:solidFill>
+              </a:rPr>
+              <a:t>PermissionNotGranted</a:t>
+            </a:r>
+            <a:r>
+              <a:rPr b="0">
+                <a:solidFill>
+                  <a:srgbClr val="263044"/>
+                </a:solidFill>
+              </a:rPr>
+              <a:t>, …)</a:t>
+            </a:r>
+          </a:p>
+          <a:p xmlns:a="http://schemas.openxmlformats.org/drawingml/2006/main">
+            <a:pPr>
+              <a:lnSpc>
+                <a:spcPts val="1300"/>
+              </a:lnSpc>
+              <a:buNone/>
+              <a:defRPr sz="1125">
+                <a:solidFill>
+                  <a:srgbClr val="263044"/>
+                </a:solidFill>
+                <a:latin typeface="Consolas"/>
+                <a:ea typeface="Consolas"/>
+                <a:cs typeface="Consolas"/>
+              </a:defRPr>
+            </a:pPr>
+            <a:r>
+              <a:rPr b="0">
+                <a:solidFill>
+                  <a:srgbClr val="263044"/>
+                </a:solidFill>
+              </a:rPr>
+              <a:t>        : </a:t>
+            </a:r>
+            <a:r>
+              <a:rPr b="1">
+                <a:solidFill>
+                  <a:srgbClr val="0067C5"/>
+                </a:solidFill>
+              </a:rPr>
+              <a:t>new</a:t>
+            </a:r>
+            <a:r>
+              <a:rPr b="0">
+                <a:solidFill>
+                  <a:srgbClr val="263044"/>
+                </a:solidFill>
+              </a:rPr>
+              <a:t>(</a:t>
+            </a:r>
+            <a:r>
+              <a:rPr b="1">
+                <a:solidFill>
+                  <a:srgbClr val="0067C5"/>
+                </a:solidFill>
+              </a:rPr>
+              <a:t>true</a:t>
+            </a:r>
+            <a:r>
+              <a:rPr b="0">
+                <a:solidFill>
+                  <a:srgbClr val="263044"/>
+                </a:solidFill>
+              </a:rPr>
+              <a:t>, </a:t>
+            </a:r>
+            <a:r>
+              <a:rPr b="0">
+                <a:solidFill>
+                  <a:srgbClr val="7651D4"/>
+                </a:solidFill>
+              </a:rPr>
+              <a:t>AccessDecisionCodes</a:t>
+            </a:r>
+            <a:r>
+              <a:rPr b="0">
+                <a:solidFill>
+                  <a:srgbClr val="263044"/>
+                </a:solidFill>
+              </a:rPr>
+              <a:t>.</a:t>
+            </a:r>
+            <a:r>
+              <a:rPr b="0">
+                <a:solidFill>
+                  <a:srgbClr val="7651D4"/>
+                </a:solidFill>
+              </a:rPr>
+              <a:t>GrantedByRole</a:t>
+            </a:r>
+            <a:r>
+              <a:rPr b="0">
+                <a:solidFill>
+                  <a:srgbClr val="263044"/>
+                </a:solidFill>
+              </a:rPr>
+              <a:t>, …);</a:t>
+            </a:r>
+          </a:p>
+          <a:p xmlns:a="http://schemas.openxmlformats.org/drawingml/2006/main">
+            <a:pPr>
+              <a:lnSpc>
+                <a:spcPts val="1300"/>
+              </a:lnSpc>
+              <a:buNone/>
+              <a:defRPr sz="1125">
+                <a:solidFill>
+                  <a:srgbClr val="263044"/>
+                </a:solidFill>
+                <a:latin typeface="Consolas"/>
+                <a:ea typeface="Consolas"/>
+                <a:cs typeface="Consolas"/>
+              </a:defRPr>
+            </a:pPr>
+            <a:r>
+              <a:rPr b="0">
+                <a:solidFill>
+                  <a:srgbClr val="263044"/>
+                </a:solidFill>
+              </a:rPr>
               <a:t>}</a:t>
             </a:r>
           </a:p>
@@ -28630,7 +29745,7 @@
                 <a:ea typeface="Aptos"/>
                 <a:cs typeface="Aptos"/>
               </a:rPr>
-              <a:t>Пријава даје идентитет, не право на approve.</a:t>
+              <a:t>Пријава даје идентитет, не право на радњу.</a:t>
             </a:r>
           </a:p>
           <a:p xmlns:a="http://schemas.openxmlformats.org/drawingml/2006/main">
@@ -28684,7 +29799,7 @@
                 <a:ea typeface="Aptos"/>
                 <a:cs typeface="Aptos"/>
               </a:rPr>
-              <a:t>Провера укључује и конкретан ресурс.</a:t>
+              <a:t>Одлуку доноси улога која додељује дозволу.</a:t>
             </a:r>
           </a:p>
           <a:p xmlns:a="http://schemas.openxmlformats.org/drawingml/2006/main">
@@ -28711,7 +29826,7 @@
                 <a:ea typeface="Aptos"/>
                 <a:cs typeface="Aptos"/>
               </a:rPr>
-              <a:t>Одбијање се дешава пре пословне промене.</a:t>
+              <a:t>Свако одбијање има стабилан код.</a:t>
             </a:r>
           </a:p>
         </p:txBody>
